--- a/assets/pptx/catalog-258.pptx
+++ b/assets/pptx/catalog-258.pptx
@@ -3358,7 +3358,7 @@
                 <a:ea typeface="Ebrima"/>
                 <a:cs typeface="Ebrima"/>
               </a:rPr>
-              <a:t>. (1) . ፍቅርህ</a:t>
+              <a:t>. 1 . ፍቅርህ</a:t>
             </a:r>
           </a:p>
           <a:p>
@@ -3443,61 +3443,61 @@
                 <a:ea typeface="Ebrima"/>
                 <a:cs typeface="Ebrima"/>
               </a:rPr>
-              <a:t>ፍቅርህ ጥልቅ ነው (ጌታዬ)</a:t>
-            </a:r>
-          </a:p>
-          <a:p>
-            <a:pPr algn="ctr">
-              <a:lnSpc>
-                <a:spcPct val="125000"/>
-              </a:lnSpc>
-            </a:pPr>
-            <a:r>
-              <a:rPr sz="3200" b="0">
-                <a:solidFill>
-                  <a:srgbClr val="FFFFFF"/>
-                </a:solidFill>
-                <a:latin typeface="Ebrima"/>
-                <a:ea typeface="Ebrima"/>
-                <a:cs typeface="Ebrima"/>
-              </a:rPr>
-              <a:t>ምህረትህ ብዙ (ጌታዬ)</a:t>
-            </a:r>
-          </a:p>
-          <a:p>
-            <a:pPr algn="ctr">
-              <a:lnSpc>
-                <a:spcPct val="125000"/>
-              </a:lnSpc>
-            </a:pPr>
-            <a:r>
-              <a:rPr sz="3200" b="0">
-                <a:solidFill>
-                  <a:srgbClr val="FFFFFF"/>
-                </a:solidFill>
-                <a:latin typeface="Ebrima"/>
-                <a:ea typeface="Ebrima"/>
-                <a:cs typeface="Ebrima"/>
-              </a:rPr>
-              <a:t>ቸርነትህ አያልቅ (ጌታዬ)</a:t>
-            </a:r>
-          </a:p>
-          <a:p>
-            <a:pPr algn="ctr">
-              <a:lnSpc>
-                <a:spcPct val="125000"/>
-              </a:lnSpc>
-            </a:pPr>
-            <a:r>
-              <a:rPr sz="3200" b="0">
-                <a:solidFill>
-                  <a:srgbClr val="FFFFFF"/>
-                </a:solidFill>
-                <a:latin typeface="Ebrima"/>
-                <a:ea typeface="Ebrima"/>
-                <a:cs typeface="Ebrima"/>
-              </a:rPr>
-              <a:t>አንተ ታላቅ ነህ (ጌታዬ)</a:t>
+              <a:t>ፍቅርህ ጥልቅ ነው ጌታዬ</a:t>
+            </a:r>
+          </a:p>
+          <a:p>
+            <a:pPr algn="ctr">
+              <a:lnSpc>
+                <a:spcPct val="125000"/>
+              </a:lnSpc>
+            </a:pPr>
+            <a:r>
+              <a:rPr sz="3200" b="0">
+                <a:solidFill>
+                  <a:srgbClr val="FFFFFF"/>
+                </a:solidFill>
+                <a:latin typeface="Ebrima"/>
+                <a:ea typeface="Ebrima"/>
+                <a:cs typeface="Ebrima"/>
+              </a:rPr>
+              <a:t>ምህረትህ ብዙ ጌታዬ</a:t>
+            </a:r>
+          </a:p>
+          <a:p>
+            <a:pPr algn="ctr">
+              <a:lnSpc>
+                <a:spcPct val="125000"/>
+              </a:lnSpc>
+            </a:pPr>
+            <a:r>
+              <a:rPr sz="3200" b="0">
+                <a:solidFill>
+                  <a:srgbClr val="FFFFFF"/>
+                </a:solidFill>
+                <a:latin typeface="Ebrima"/>
+                <a:ea typeface="Ebrima"/>
+                <a:cs typeface="Ebrima"/>
+              </a:rPr>
+              <a:t>ቸርነትህ አያልቅ ጌታዬ</a:t>
+            </a:r>
+          </a:p>
+          <a:p>
+            <a:pPr algn="ctr">
+              <a:lnSpc>
+                <a:spcPct val="125000"/>
+              </a:lnSpc>
+            </a:pPr>
+            <a:r>
+              <a:rPr sz="3200" b="0">
+                <a:solidFill>
+                  <a:srgbClr val="FFFFFF"/>
+                </a:solidFill>
+                <a:latin typeface="Ebrima"/>
+                <a:ea typeface="Ebrima"/>
+                <a:cs typeface="Ebrima"/>
+              </a:rPr>
+              <a:t>አንተ ታላቅ ነህ ጌታዬ</a:t>
             </a:r>
           </a:p>
           <a:p>
@@ -3533,7 +3533,7 @@
                 <a:ea typeface="Ebrima"/>
                 <a:cs typeface="Ebrima"/>
               </a:rPr>
-              <a:t>አንተ ነህ ባለውለታዬ/አንተ ልዩ ነህ ለእኔ (2x)</a:t>
+              <a:t>አንተ ነህ ባለውለታዬ/አንተ ልዩ ነህ ለእኔ 2x</a:t>
             </a:r>
           </a:p>
         </p:txBody>
@@ -3600,61 +3600,61 @@
                 <a:ea typeface="Ebrima"/>
                 <a:cs typeface="Ebrima"/>
               </a:rPr>
-              <a:t>ፍቅርህ ጥልቅ ነው (ጌታዬ)</a:t>
-            </a:r>
-          </a:p>
-          <a:p>
-            <a:pPr algn="ctr">
-              <a:lnSpc>
-                <a:spcPct val="125000"/>
-              </a:lnSpc>
-            </a:pPr>
-            <a:r>
-              <a:rPr sz="3200" b="0">
-                <a:solidFill>
-                  <a:srgbClr val="FFFFFF"/>
-                </a:solidFill>
-                <a:latin typeface="Ebrima"/>
-                <a:ea typeface="Ebrima"/>
-                <a:cs typeface="Ebrima"/>
-              </a:rPr>
-              <a:t>ምህረትህ ብዙ (ጌታዬ)</a:t>
-            </a:r>
-          </a:p>
-          <a:p>
-            <a:pPr algn="ctr">
-              <a:lnSpc>
-                <a:spcPct val="125000"/>
-              </a:lnSpc>
-            </a:pPr>
-            <a:r>
-              <a:rPr sz="3200" b="0">
-                <a:solidFill>
-                  <a:srgbClr val="FFFFFF"/>
-                </a:solidFill>
-                <a:latin typeface="Ebrima"/>
-                <a:ea typeface="Ebrima"/>
-                <a:cs typeface="Ebrima"/>
-              </a:rPr>
-              <a:t>ቸርነትህ አያልቅ (ጌታዬ)</a:t>
-            </a:r>
-          </a:p>
-          <a:p>
-            <a:pPr algn="ctr">
-              <a:lnSpc>
-                <a:spcPct val="125000"/>
-              </a:lnSpc>
-            </a:pPr>
-            <a:r>
-              <a:rPr sz="3200" b="0">
-                <a:solidFill>
-                  <a:srgbClr val="FFFFFF"/>
-                </a:solidFill>
-                <a:latin typeface="Ebrima"/>
-                <a:ea typeface="Ebrima"/>
-                <a:cs typeface="Ebrima"/>
-              </a:rPr>
-              <a:t>አንተ ታላቅ ነህ (ጌታዬ)</a:t>
+              <a:t>ፍቅርህ ጥልቅ ነው ጌታዬ</a:t>
+            </a:r>
+          </a:p>
+          <a:p>
+            <a:pPr algn="ctr">
+              <a:lnSpc>
+                <a:spcPct val="125000"/>
+              </a:lnSpc>
+            </a:pPr>
+            <a:r>
+              <a:rPr sz="3200" b="0">
+                <a:solidFill>
+                  <a:srgbClr val="FFFFFF"/>
+                </a:solidFill>
+                <a:latin typeface="Ebrima"/>
+                <a:ea typeface="Ebrima"/>
+                <a:cs typeface="Ebrima"/>
+              </a:rPr>
+              <a:t>ምህረትህ ብዙ ጌታዬ</a:t>
+            </a:r>
+          </a:p>
+          <a:p>
+            <a:pPr algn="ctr">
+              <a:lnSpc>
+                <a:spcPct val="125000"/>
+              </a:lnSpc>
+            </a:pPr>
+            <a:r>
+              <a:rPr sz="3200" b="0">
+                <a:solidFill>
+                  <a:srgbClr val="FFFFFF"/>
+                </a:solidFill>
+                <a:latin typeface="Ebrima"/>
+                <a:ea typeface="Ebrima"/>
+                <a:cs typeface="Ebrima"/>
+              </a:rPr>
+              <a:t>ቸርነትህ አያልቅ ጌታዬ</a:t>
+            </a:r>
+          </a:p>
+          <a:p>
+            <a:pPr algn="ctr">
+              <a:lnSpc>
+                <a:spcPct val="125000"/>
+              </a:lnSpc>
+            </a:pPr>
+            <a:r>
+              <a:rPr sz="3200" b="0">
+                <a:solidFill>
+                  <a:srgbClr val="FFFFFF"/>
+                </a:solidFill>
+                <a:latin typeface="Ebrima"/>
+                <a:ea typeface="Ebrima"/>
+                <a:cs typeface="Ebrima"/>
+              </a:rPr>
+              <a:t>አንተ ታላቅ ነህ ጌታዬ</a:t>
             </a:r>
           </a:p>
           <a:p>
@@ -3690,7 +3690,7 @@
                 <a:ea typeface="Ebrima"/>
                 <a:cs typeface="Ebrima"/>
               </a:rPr>
-              <a:t>አንተ ነህ ባለውለታዬ/አንተ ልዩ ነህ ለእኔ (2x)</a:t>
+              <a:t>አንተ ነህ ባለውለታዬ/አንተ ልዩ ነህ ለእኔ 2x</a:t>
             </a:r>
           </a:p>
         </p:txBody>
@@ -4089,61 +4089,61 @@
                 <a:ea typeface="Ebrima"/>
                 <a:cs typeface="Ebrima"/>
               </a:rPr>
-              <a:t>ፍቅርህ ጥልቅ ነው (ጌታዬ)</a:t>
-            </a:r>
-          </a:p>
-          <a:p>
-            <a:pPr algn="ctr">
-              <a:lnSpc>
-                <a:spcPct val="125000"/>
-              </a:lnSpc>
-            </a:pPr>
-            <a:r>
-              <a:rPr sz="3200" b="0">
-                <a:solidFill>
-                  <a:srgbClr val="FFFFFF"/>
-                </a:solidFill>
-                <a:latin typeface="Ebrima"/>
-                <a:ea typeface="Ebrima"/>
-                <a:cs typeface="Ebrima"/>
-              </a:rPr>
-              <a:t>ምህረትህ ብዙ (ጌታዬ)</a:t>
-            </a:r>
-          </a:p>
-          <a:p>
-            <a:pPr algn="ctr">
-              <a:lnSpc>
-                <a:spcPct val="125000"/>
-              </a:lnSpc>
-            </a:pPr>
-            <a:r>
-              <a:rPr sz="3200" b="0">
-                <a:solidFill>
-                  <a:srgbClr val="FFFFFF"/>
-                </a:solidFill>
-                <a:latin typeface="Ebrima"/>
-                <a:ea typeface="Ebrima"/>
-                <a:cs typeface="Ebrima"/>
-              </a:rPr>
-              <a:t>ቸርነትህ አያልቅ (ጌታዬ)</a:t>
-            </a:r>
-          </a:p>
-          <a:p>
-            <a:pPr algn="ctr">
-              <a:lnSpc>
-                <a:spcPct val="125000"/>
-              </a:lnSpc>
-            </a:pPr>
-            <a:r>
-              <a:rPr sz="3200" b="0">
-                <a:solidFill>
-                  <a:srgbClr val="FFFFFF"/>
-                </a:solidFill>
-                <a:latin typeface="Ebrima"/>
-                <a:ea typeface="Ebrima"/>
-                <a:cs typeface="Ebrima"/>
-              </a:rPr>
-              <a:t>አንተ ታላቅ ነህ (ጌታዬ)</a:t>
+              <a:t>ፍቅርህ ጥልቅ ነው ጌታዬ</a:t>
+            </a:r>
+          </a:p>
+          <a:p>
+            <a:pPr algn="ctr">
+              <a:lnSpc>
+                <a:spcPct val="125000"/>
+              </a:lnSpc>
+            </a:pPr>
+            <a:r>
+              <a:rPr sz="3200" b="0">
+                <a:solidFill>
+                  <a:srgbClr val="FFFFFF"/>
+                </a:solidFill>
+                <a:latin typeface="Ebrima"/>
+                <a:ea typeface="Ebrima"/>
+                <a:cs typeface="Ebrima"/>
+              </a:rPr>
+              <a:t>ምህረትህ ብዙ ጌታዬ</a:t>
+            </a:r>
+          </a:p>
+          <a:p>
+            <a:pPr algn="ctr">
+              <a:lnSpc>
+                <a:spcPct val="125000"/>
+              </a:lnSpc>
+            </a:pPr>
+            <a:r>
+              <a:rPr sz="3200" b="0">
+                <a:solidFill>
+                  <a:srgbClr val="FFFFFF"/>
+                </a:solidFill>
+                <a:latin typeface="Ebrima"/>
+                <a:ea typeface="Ebrima"/>
+                <a:cs typeface="Ebrima"/>
+              </a:rPr>
+              <a:t>ቸርነትህ አያልቅ ጌታዬ</a:t>
+            </a:r>
+          </a:p>
+          <a:p>
+            <a:pPr algn="ctr">
+              <a:lnSpc>
+                <a:spcPct val="125000"/>
+              </a:lnSpc>
+            </a:pPr>
+            <a:r>
+              <a:rPr sz="3200" b="0">
+                <a:solidFill>
+                  <a:srgbClr val="FFFFFF"/>
+                </a:solidFill>
+                <a:latin typeface="Ebrima"/>
+                <a:ea typeface="Ebrima"/>
+                <a:cs typeface="Ebrima"/>
+              </a:rPr>
+              <a:t>አንተ ታላቅ ነህ ጌታዬ</a:t>
             </a:r>
           </a:p>
           <a:p>
@@ -4179,7 +4179,7 @@
                 <a:ea typeface="Ebrima"/>
                 <a:cs typeface="Ebrima"/>
               </a:rPr>
-              <a:t>አንተ ነህ ባለውለታዬ/አንተ ልዩ ነህ ለእኔ (2x)</a:t>
+              <a:t>አንተ ነህ ባለውለታዬ/አንተ ልዩ ነህ ለእኔ 2x</a:t>
             </a:r>
           </a:p>
         </p:txBody>
@@ -4542,61 +4542,61 @@
                 <a:ea typeface="Ebrima"/>
                 <a:cs typeface="Ebrima"/>
               </a:rPr>
-              <a:t>ፍቅርህ ጥልቅ ነው (ጌታዬ)</a:t>
-            </a:r>
-          </a:p>
-          <a:p>
-            <a:pPr algn="ctr">
-              <a:lnSpc>
-                <a:spcPct val="125000"/>
-              </a:lnSpc>
-            </a:pPr>
-            <a:r>
-              <a:rPr sz="3200" b="0">
-                <a:solidFill>
-                  <a:srgbClr val="FFFFFF"/>
-                </a:solidFill>
-                <a:latin typeface="Ebrima"/>
-                <a:ea typeface="Ebrima"/>
-                <a:cs typeface="Ebrima"/>
-              </a:rPr>
-              <a:t>ምህረትህ ብዙ (ጌታዬ)</a:t>
-            </a:r>
-          </a:p>
-          <a:p>
-            <a:pPr algn="ctr">
-              <a:lnSpc>
-                <a:spcPct val="125000"/>
-              </a:lnSpc>
-            </a:pPr>
-            <a:r>
-              <a:rPr sz="3200" b="0">
-                <a:solidFill>
-                  <a:srgbClr val="FFFFFF"/>
-                </a:solidFill>
-                <a:latin typeface="Ebrima"/>
-                <a:ea typeface="Ebrima"/>
-                <a:cs typeface="Ebrima"/>
-              </a:rPr>
-              <a:t>ቸርነትህ አያልቅ (ጌታዬ)</a:t>
-            </a:r>
-          </a:p>
-          <a:p>
-            <a:pPr algn="ctr">
-              <a:lnSpc>
-                <a:spcPct val="125000"/>
-              </a:lnSpc>
-            </a:pPr>
-            <a:r>
-              <a:rPr sz="3200" b="0">
-                <a:solidFill>
-                  <a:srgbClr val="FFFFFF"/>
-                </a:solidFill>
-                <a:latin typeface="Ebrima"/>
-                <a:ea typeface="Ebrima"/>
-                <a:cs typeface="Ebrima"/>
-              </a:rPr>
-              <a:t>አንተ ታላቅ ነህ (ጌታዬ)</a:t>
+              <a:t>ፍቅርህ ጥልቅ ነው ጌታዬ</a:t>
+            </a:r>
+          </a:p>
+          <a:p>
+            <a:pPr algn="ctr">
+              <a:lnSpc>
+                <a:spcPct val="125000"/>
+              </a:lnSpc>
+            </a:pPr>
+            <a:r>
+              <a:rPr sz="3200" b="0">
+                <a:solidFill>
+                  <a:srgbClr val="FFFFFF"/>
+                </a:solidFill>
+                <a:latin typeface="Ebrima"/>
+                <a:ea typeface="Ebrima"/>
+                <a:cs typeface="Ebrima"/>
+              </a:rPr>
+              <a:t>ምህረትህ ብዙ ጌታዬ</a:t>
+            </a:r>
+          </a:p>
+          <a:p>
+            <a:pPr algn="ctr">
+              <a:lnSpc>
+                <a:spcPct val="125000"/>
+              </a:lnSpc>
+            </a:pPr>
+            <a:r>
+              <a:rPr sz="3200" b="0">
+                <a:solidFill>
+                  <a:srgbClr val="FFFFFF"/>
+                </a:solidFill>
+                <a:latin typeface="Ebrima"/>
+                <a:ea typeface="Ebrima"/>
+                <a:cs typeface="Ebrima"/>
+              </a:rPr>
+              <a:t>ቸርነትህ አያልቅ ጌታዬ</a:t>
+            </a:r>
+          </a:p>
+          <a:p>
+            <a:pPr algn="ctr">
+              <a:lnSpc>
+                <a:spcPct val="125000"/>
+              </a:lnSpc>
+            </a:pPr>
+            <a:r>
+              <a:rPr sz="3200" b="0">
+                <a:solidFill>
+                  <a:srgbClr val="FFFFFF"/>
+                </a:solidFill>
+                <a:latin typeface="Ebrima"/>
+                <a:ea typeface="Ebrima"/>
+                <a:cs typeface="Ebrima"/>
+              </a:rPr>
+              <a:t>አንተ ታላቅ ነህ ጌታዬ</a:t>
             </a:r>
           </a:p>
           <a:p>
@@ -4632,7 +4632,7 @@
                 <a:ea typeface="Ebrima"/>
                 <a:cs typeface="Ebrima"/>
               </a:rPr>
-              <a:t>አንተ ነህ ባለውለታዬ/አንተ ልዩ ነህ ለእኔ (2x)</a:t>
+              <a:t>አንተ ነህ ባለውለታዬ/አንተ ልዩ ነህ ለእኔ 2x</a:t>
             </a:r>
           </a:p>
         </p:txBody>
